--- a/ppt/X25132377_wildlife-conservation-monitoring.pptx
+++ b/ppt/X25132377_wildlife-conservation-monitoring.pptx
@@ -3095,60 +3095,14 @@
       <p:grpSpPr/>
       <p:sp>
         <p:nvSpPr>
-          <p:cNvPr id="2" name="Rounded Rectangle 1"/>
+          <p:cNvPr id="2" name="Rectangle 1"/>
           <p:cNvSpPr/>
           <p:nvPr/>
         </p:nvSpPr>
         <p:spPr>
           <a:xfrm>
-            <a:off x="1371600" y="1280160"/>
-            <a:ext cx="9445752" cy="4297680"/>
-          </a:xfrm>
-          <a:prstGeom prst="roundRect">
-            <a:avLst/>
-          </a:prstGeom>
-          <a:solidFill>
-            <a:srgbClr val="E5EDE8"/>
-          </a:solidFill>
-          <a:ln w="19050">
-            <a:solidFill>
-              <a:srgbClr val="2E6B46"/>
-            </a:solidFill>
-          </a:ln>
-          <a:effectLst/>
-        </p:spPr>
-        <p:style>
-          <a:lnRef idx="1">
-            <a:schemeClr val="accent1"/>
-          </a:lnRef>
-          <a:fillRef idx="3">
-            <a:schemeClr val="accent1"/>
-          </a:fillRef>
-          <a:effectRef idx="2">
-            <a:schemeClr val="accent1"/>
-          </a:effectRef>
-          <a:fontRef idx="minor">
-            <a:schemeClr val="lt1"/>
-          </a:fontRef>
-        </p:style>
-        <p:txBody>
-          <a:bodyPr rtlCol="0" anchor="ctr"/>
-          <a:lstStyle/>
-          <a:p>
-            <a:pPr algn="ctr"/>
-          </a:p>
-        </p:txBody>
-      </p:sp>
-      <p:sp>
-        <p:nvSpPr>
-          <p:cNvPr id="3" name="Rectangle 2"/>
-          <p:cNvSpPr/>
-          <p:nvPr/>
-        </p:nvSpPr>
-        <p:spPr>
-          <a:xfrm>
-            <a:off x="1371600" y="1280160"/>
-            <a:ext cx="9445752" cy="146304"/>
+            <a:off x="-91440" y="-91440"/>
+            <a:ext cx="12435840" cy="7040880"/>
           </a:xfrm>
           <a:prstGeom prst="rect">
             <a:avLst/>
@@ -3185,14 +3139,102 @@
       </p:sp>
       <p:sp>
         <p:nvSpPr>
-          <p:cNvPr id="4" name="TextBox 3"/>
+          <p:cNvPr id="3" name="Rectangle 2"/>
+          <p:cNvSpPr/>
+          <p:nvPr/>
+        </p:nvSpPr>
+        <p:spPr>
+          <a:xfrm>
+            <a:off x="457200" y="457200"/>
+            <a:ext cx="11277295" cy="5943600"/>
+          </a:xfrm>
+          <a:prstGeom prst="rect">
+            <a:avLst/>
+          </a:prstGeom>
+          <a:noFill/>
+          <a:ln w="19050">
+            <a:solidFill>
+              <a:srgbClr val="B5CBBE"/>
+            </a:solidFill>
+          </a:ln>
+          <a:effectLst/>
+        </p:spPr>
+        <p:style>
+          <a:lnRef idx="1">
+            <a:schemeClr val="accent1"/>
+          </a:lnRef>
+          <a:fillRef idx="3">
+            <a:schemeClr val="accent1"/>
+          </a:fillRef>
+          <a:effectRef idx="2">
+            <a:schemeClr val="accent1"/>
+          </a:effectRef>
+          <a:fontRef idx="minor">
+            <a:schemeClr val="lt1"/>
+          </a:fontRef>
+        </p:style>
+        <p:txBody>
+          <a:bodyPr rtlCol="0" anchor="ctr"/>
+          <a:lstStyle/>
+          <a:p>
+            <a:pPr algn="ctr"/>
+          </a:p>
+        </p:txBody>
+      </p:sp>
+      <p:sp>
+        <p:nvSpPr>
+          <p:cNvPr id="4" name="Oval 3"/>
+          <p:cNvSpPr/>
+          <p:nvPr/>
+        </p:nvSpPr>
+        <p:spPr>
+          <a:xfrm>
+            <a:off x="5479084" y="1120139"/>
+            <a:ext cx="1234440" cy="1234440"/>
+          </a:xfrm>
+          <a:prstGeom prst="ellipse">
+            <a:avLst/>
+          </a:prstGeom>
+          <a:solidFill>
+            <a:srgbClr val="FFFFFF"/>
+          </a:solidFill>
+          <a:ln>
+            <a:noFill/>
+          </a:ln>
+          <a:effectLst/>
+        </p:spPr>
+        <p:style>
+          <a:lnRef idx="1">
+            <a:schemeClr val="accent1"/>
+          </a:lnRef>
+          <a:fillRef idx="3">
+            <a:schemeClr val="accent1"/>
+          </a:fillRef>
+          <a:effectRef idx="2">
+            <a:schemeClr val="accent1"/>
+          </a:effectRef>
+          <a:fontRef idx="minor">
+            <a:schemeClr val="lt1"/>
+          </a:fontRef>
+        </p:style>
+        <p:txBody>
+          <a:bodyPr rtlCol="0" anchor="ctr"/>
+          <a:lstStyle/>
+          <a:p>
+            <a:pPr algn="ctr"/>
+          </a:p>
+        </p:txBody>
+      </p:sp>
+      <p:sp>
+        <p:nvSpPr>
+          <p:cNvPr id="5" name="TextBox 4"/>
           <p:cNvSpPr txBox="1"/>
           <p:nvPr/>
         </p:nvSpPr>
         <p:spPr>
           <a:xfrm>
-            <a:off x="1920240" y="2103120"/>
-            <a:ext cx="8321040" cy="1371600"/>
+            <a:off x="5479084" y="1120139"/>
+            <a:ext cx="1234440" cy="1234440"/>
           </a:xfrm>
           <a:prstGeom prst="rect">
             <a:avLst/>
@@ -3200,34 +3242,34 @@
           <a:noFill/>
         </p:spPr>
         <p:txBody>
-          <a:bodyPr wrap="square" anchor="ctr">
+          <a:bodyPr wrap="none" anchor="ctr">
             <a:spAutoFit/>
           </a:bodyPr>
           <a:lstStyle/>
           <a:p>
             <a:pPr algn="ctr"/>
             <a:r>
-              <a:rPr sz="2900" b="1">
+              <a:rPr sz="4000" b="1">
                 <a:solidFill>
                   <a:srgbClr val="2E6B46"/>
                 </a:solidFill>
                 <a:latin typeface="Cambria"/>
               </a:rPr>
-              <a:t>Wildlife Conservation Habitat Monitoring</a:t>
-            </a:r>
-          </a:p>
-        </p:txBody>
-      </p:sp>
-      <p:sp>
-        <p:nvSpPr>
-          <p:cNvPr id="5" name="TextBox 4"/>
+              <a:t>WC</a:t>
+            </a:r>
+          </a:p>
+        </p:txBody>
+      </p:sp>
+      <p:sp>
+        <p:nvSpPr>
+          <p:cNvPr id="6" name="TextBox 5"/>
           <p:cNvSpPr txBox="1"/>
           <p:nvPr/>
         </p:nvSpPr>
         <p:spPr>
           <a:xfrm>
-            <a:off x="1920240" y="3383280"/>
-            <a:ext cx="8321040" cy="1828800"/>
+            <a:off x="1188720" y="2880360"/>
+            <a:ext cx="9784080" cy="1463040"/>
           </a:xfrm>
           <a:prstGeom prst="rect">
             <a:avLst/>
@@ -3235,6 +3277,41 @@
           <a:noFill/>
         </p:spPr>
         <p:txBody>
+          <a:bodyPr wrap="square" anchor="ctr">
+            <a:spAutoFit/>
+          </a:bodyPr>
+          <a:lstStyle/>
+          <a:p>
+            <a:pPr algn="ctr"/>
+            <a:r>
+              <a:rPr sz="3400" b="1" i="0">
+                <a:solidFill>
+                  <a:srgbClr val="FFFFFF"/>
+                </a:solidFill>
+                <a:latin typeface="Cambria"/>
+              </a:rPr>
+              <a:t>Wildlife Conservation Habitat Monitoring</a:t>
+            </a:r>
+          </a:p>
+        </p:txBody>
+      </p:sp>
+      <p:sp>
+        <p:nvSpPr>
+          <p:cNvPr id="7" name="TextBox 6"/>
+          <p:cNvSpPr txBox="1"/>
+          <p:nvPr/>
+        </p:nvSpPr>
+        <p:spPr>
+          <a:xfrm>
+            <a:off x="1371600" y="4206240"/>
+            <a:ext cx="9418320" cy="548640"/>
+          </a:xfrm>
+          <a:prstGeom prst="rect">
+            <a:avLst/>
+          </a:prstGeom>
+          <a:noFill/>
+        </p:spPr>
+        <p:txBody>
           <a:bodyPr wrap="square" anchor="t">
             <a:spAutoFit/>
           </a:bodyPr>
@@ -3242,37 +3319,84 @@
           <a:p>
             <a:pPr algn="ctr"/>
             <a:r>
-              <a:rPr sz="1700" b="0">
-                <a:solidFill>
-                  <a:srgbClr val="5C655F"/>
+              <a:rPr sz="1700" b="0" i="1">
+                <a:solidFill>
+                  <a:srgbClr val="C4D5CB"/>
                 </a:solidFill>
                 <a:latin typeface="Georgia"/>
               </a:rPr>
               <a:t>A fog-to-serverless habitat monitoring pipeline, live on AWS</a:t>
             </a:r>
           </a:p>
+        </p:txBody>
+      </p:sp>
+      <p:sp>
+        <p:nvSpPr>
+          <p:cNvPr id="8" name="TextBox 7"/>
+          <p:cNvSpPr txBox="1"/>
+          <p:nvPr/>
+        </p:nvSpPr>
+        <p:spPr>
+          <a:xfrm>
+            <a:off x="1371600" y="5029200"/>
+            <a:ext cx="9418320" cy="1280160"/>
+          </a:xfrm>
+          <a:prstGeom prst="rect">
+            <a:avLst/>
+          </a:prstGeom>
+          <a:noFill/>
+        </p:spPr>
+        <p:txBody>
+          <a:bodyPr wrap="square" anchor="t">
+            <a:spAutoFit/>
+          </a:bodyPr>
+          <a:lstStyle/>
           <a:p>
             <a:pPr algn="ctr"/>
             <a:r>
-              <a:rPr sz="1500" b="1">
-                <a:solidFill>
-                  <a:srgbClr val="232A26"/>
+              <a:rPr sz="1700" b="1" i="0">
+                <a:solidFill>
+                  <a:srgbClr val="FFFFFF"/>
                 </a:solidFill>
                 <a:latin typeface="Georgia"/>
               </a:rPr>
-              <a:t>Hrishikesh Sajeev    Student ID X25132377</a:t>
+              <a:t>Hrishikesh Sajeev</a:t>
             </a:r>
           </a:p>
           <a:p>
             <a:pPr algn="ctr"/>
             <a:r>
-              <a:rPr sz="1200" b="0">
-                <a:solidFill>
-                  <a:srgbClr val="5C655F"/>
+              <a:rPr sz="1300" b="0" i="0">
+                <a:solidFill>
+                  <a:srgbClr val="ABC3B5"/>
                 </a:solidFill>
                 <a:latin typeface="Georgia"/>
               </a:rPr>
-              <a:t>Fog and Edge Computing (H9FECC), National College of Ireland</a:t>
+              <a:t>Student ID X25132377</a:t>
+            </a:r>
+          </a:p>
+          <a:p>
+            <a:pPr algn="ctr"/>
+            <a:r>
+              <a:rPr sz="1250" b="0" i="0">
+                <a:solidFill>
+                  <a:srgbClr val="ABC3B5"/>
+                </a:solidFill>
+                <a:latin typeface="Georgia"/>
+              </a:rPr>
+              <a:t>MSc in Cloud Computing   ·   Fog and Edge Computing (H9FECC)</a:t>
+            </a:r>
+          </a:p>
+          <a:p>
+            <a:pPr algn="ctr"/>
+            <a:r>
+              <a:rPr sz="1250" b="0" i="0">
+                <a:solidFill>
+                  <a:srgbClr val="ABC3B5"/>
+                </a:solidFill>
+                <a:latin typeface="Georgia"/>
+              </a:rPr>
+              <a:t>National College of Ireland</a:t>
             </a:r>
           </a:p>
         </p:txBody>

--- a/ppt/X25132377_wildlife-conservation-monitoring.pptx
+++ b/ppt/X25132377_wildlife-conservation-monitoring.pptx
@@ -3183,58 +3183,14 @@
       </p:sp>
       <p:sp>
         <p:nvSpPr>
-          <p:cNvPr id="4" name="Oval 3"/>
-          <p:cNvSpPr/>
+          <p:cNvPr id="4" name="TextBox 3"/>
+          <p:cNvSpPr txBox="1"/>
           <p:nvPr/>
         </p:nvSpPr>
         <p:spPr>
           <a:xfrm>
-            <a:off x="5479084" y="1120139"/>
-            <a:ext cx="1234440" cy="1234440"/>
-          </a:xfrm>
-          <a:prstGeom prst="ellipse">
-            <a:avLst/>
-          </a:prstGeom>
-          <a:solidFill>
-            <a:srgbClr val="FFFFFF"/>
-          </a:solidFill>
-          <a:ln>
-            <a:noFill/>
-          </a:ln>
-          <a:effectLst/>
-        </p:spPr>
-        <p:style>
-          <a:lnRef idx="1">
-            <a:schemeClr val="accent1"/>
-          </a:lnRef>
-          <a:fillRef idx="3">
-            <a:schemeClr val="accent1"/>
-          </a:fillRef>
-          <a:effectRef idx="2">
-            <a:schemeClr val="accent1"/>
-          </a:effectRef>
-          <a:fontRef idx="minor">
-            <a:schemeClr val="lt1"/>
-          </a:fontRef>
-        </p:style>
-        <p:txBody>
-          <a:bodyPr rtlCol="0" anchor="ctr"/>
-          <a:lstStyle/>
-          <a:p>
-            <a:pPr algn="ctr"/>
-          </a:p>
-        </p:txBody>
-      </p:sp>
-      <p:sp>
-        <p:nvSpPr>
-          <p:cNvPr id="5" name="TextBox 4"/>
-          <p:cNvSpPr txBox="1"/>
-          <p:nvPr/>
-        </p:nvSpPr>
-        <p:spPr>
-          <a:xfrm>
-            <a:off x="5479084" y="1120139"/>
-            <a:ext cx="1234440" cy="1234440"/>
+            <a:off x="1188720" y="2103120"/>
+            <a:ext cx="9784080" cy="1783080"/>
           </a:xfrm>
           <a:prstGeom prst="rect">
             <a:avLst/>
@@ -3242,41 +3198,6 @@
           <a:noFill/>
         </p:spPr>
         <p:txBody>
-          <a:bodyPr wrap="none" anchor="ctr">
-            <a:spAutoFit/>
-          </a:bodyPr>
-          <a:lstStyle/>
-          <a:p>
-            <a:pPr algn="ctr"/>
-            <a:r>
-              <a:rPr sz="4000" b="1">
-                <a:solidFill>
-                  <a:srgbClr val="2E6B46"/>
-                </a:solidFill>
-                <a:latin typeface="Cambria"/>
-              </a:rPr>
-              <a:t>WC</a:t>
-            </a:r>
-          </a:p>
-        </p:txBody>
-      </p:sp>
-      <p:sp>
-        <p:nvSpPr>
-          <p:cNvPr id="6" name="TextBox 5"/>
-          <p:cNvSpPr txBox="1"/>
-          <p:nvPr/>
-        </p:nvSpPr>
-        <p:spPr>
-          <a:xfrm>
-            <a:off x="1188720" y="2880360"/>
-            <a:ext cx="9784080" cy="1463040"/>
-          </a:xfrm>
-          <a:prstGeom prst="rect">
-            <a:avLst/>
-          </a:prstGeom>
-          <a:noFill/>
-        </p:spPr>
-        <p:txBody>
           <a:bodyPr wrap="square" anchor="ctr">
             <a:spAutoFit/>
           </a:bodyPr>
@@ -3297,13 +3218,13 @@
       </p:sp>
       <p:sp>
         <p:nvSpPr>
-          <p:cNvPr id="7" name="TextBox 6"/>
+          <p:cNvPr id="5" name="TextBox 4"/>
           <p:cNvSpPr txBox="1"/>
           <p:nvPr/>
         </p:nvSpPr>
         <p:spPr>
           <a:xfrm>
-            <a:off x="1371600" y="4206240"/>
+            <a:off x="1371600" y="3931920"/>
             <a:ext cx="9418320" cy="548640"/>
           </a:xfrm>
           <a:prstGeom prst="rect">
@@ -3332,13 +3253,13 @@
       </p:sp>
       <p:sp>
         <p:nvSpPr>
-          <p:cNvPr id="8" name="TextBox 7"/>
+          <p:cNvPr id="6" name="TextBox 5"/>
           <p:cNvSpPr txBox="1"/>
           <p:nvPr/>
         </p:nvSpPr>
         <p:spPr>
           <a:xfrm>
-            <a:off x="1371600" y="5029200"/>
+            <a:off x="1371600" y="4800600"/>
             <a:ext cx="9418320" cy="1280160"/>
           </a:xfrm>
           <a:prstGeom prst="rect">

--- a/ppt/X25132377_wildlife-conservation-monitoring.pptx
+++ b/ppt/X25132377_wildlife-conservation-monitoring.pptx
@@ -3342,60 +3342,14 @@
       <p:grpSpPr/>
       <p:sp>
         <p:nvSpPr>
-          <p:cNvPr id="4" name="Rounded Rectangle 3"/>
+          <p:cNvPr id="4" name="Rectangle 3"/>
           <p:cNvSpPr/>
           <p:nvPr/>
         </p:nvSpPr>
         <p:spPr>
           <a:xfrm>
-            <a:off x="502920" y="457200"/>
-            <a:ext cx="11183112" cy="5943600"/>
-          </a:xfrm>
-          <a:prstGeom prst="roundRect">
-            <a:avLst/>
-          </a:prstGeom>
-          <a:solidFill>
-            <a:srgbClr val="E5EDE8"/>
-          </a:solidFill>
-          <a:ln w="15240">
-            <a:solidFill>
-              <a:srgbClr val="2E6B46"/>
-            </a:solidFill>
-          </a:ln>
-          <a:effectLst/>
-        </p:spPr>
-        <p:style>
-          <a:lnRef idx="1">
-            <a:schemeClr val="accent1"/>
-          </a:lnRef>
-          <a:fillRef idx="3">
-            <a:schemeClr val="accent1"/>
-          </a:fillRef>
-          <a:effectRef idx="2">
-            <a:schemeClr val="accent1"/>
-          </a:effectRef>
-          <a:fontRef idx="minor">
-            <a:schemeClr val="lt1"/>
-          </a:fontRef>
-        </p:style>
-        <p:txBody>
-          <a:bodyPr rtlCol="0" anchor="ctr"/>
-          <a:lstStyle/>
-          <a:p>
-            <a:pPr algn="ctr"/>
-          </a:p>
-        </p:txBody>
-      </p:sp>
-      <p:sp>
-        <p:nvSpPr>
-          <p:cNvPr id="5" name="Rectangle 4"/>
-          <p:cNvSpPr/>
-          <p:nvPr/>
-        </p:nvSpPr>
-        <p:spPr>
-          <a:xfrm>
-            <a:off x="502920" y="457200"/>
-            <a:ext cx="11183112" cy="640080"/>
+            <a:off x="0" y="0"/>
+            <a:ext cx="310896" cy="6858000"/>
           </a:xfrm>
           <a:prstGeom prst="rect">
             <a:avLst/>
@@ -3442,19 +3396,19 @@
         </p:nvSpPr>
         <p:spPr>
           <a:xfrm>
-            <a:off x="822960" y="457200"/>
-            <a:ext cx="10515600" cy="640080"/>
+            <a:off x="713232" y="384048"/>
+            <a:ext cx="10789920" cy="868680"/>
           </a:xfrm>
         </p:spPr>
         <p:txBody>
-          <a:bodyPr wrap="square" anchor="ctr"/>
+          <a:bodyPr wrap="square" anchor="t"/>
           <a:lstStyle/>
           <a:p>
             <a:pPr algn="l"/>
             <a:r>
-              <a:rPr b="1" sz="2200">
-                <a:solidFill>
-                  <a:srgbClr val="FFFFFF"/>
+              <a:rPr b="1" sz="2700">
+                <a:solidFill>
+                  <a:srgbClr val="2E6B46"/>
                 </a:solidFill>
                 <a:latin typeface="Cambria"/>
               </a:rPr>
@@ -3475,8 +3429,8 @@
         </p:nvSpPr>
         <p:spPr>
           <a:xfrm>
-            <a:off x="960120" y="1371600"/>
-            <a:ext cx="10241280" cy="4754880"/>
+            <a:off x="731520" y="1481328"/>
+            <a:ext cx="10835640" cy="4846320"/>
           </a:xfrm>
         </p:spPr>
         <p:txBody>
@@ -3646,70 +3600,6 @@
           </a:p>
         </p:txBody>
       </p:sp>
-    </p:spTree>
-  </p:cSld>
-  <p:clrMapOvr>
-    <a:masterClrMapping/>
-  </p:clrMapOvr>
-</p:sld>
-</file>
-
-<file path=ppt/slides/slide3.xml><?xml version="1.0" encoding="utf-8"?>
-<p:sld xmlns:a="http://schemas.openxmlformats.org/drawingml/2006/main" xmlns:p="http://schemas.openxmlformats.org/presentationml/2006/main" xmlns:r="http://schemas.openxmlformats.org/officeDocument/2006/relationships">
-  <p:cSld>
-    <p:spTree>
-      <p:nvGrpSpPr>
-        <p:cNvPr id="1" name=""/>
-        <p:cNvGrpSpPr/>
-        <p:nvPr/>
-      </p:nvGrpSpPr>
-      <p:grpSpPr/>
-      <p:sp>
-        <p:nvSpPr>
-          <p:cNvPr id="4" name="Rounded Rectangle 3"/>
-          <p:cNvSpPr/>
-          <p:nvPr/>
-        </p:nvSpPr>
-        <p:spPr>
-          <a:xfrm>
-            <a:off x="502920" y="457200"/>
-            <a:ext cx="11183112" cy="5943600"/>
-          </a:xfrm>
-          <a:prstGeom prst="roundRect">
-            <a:avLst/>
-          </a:prstGeom>
-          <a:solidFill>
-            <a:srgbClr val="E5EDE8"/>
-          </a:solidFill>
-          <a:ln w="15240">
-            <a:solidFill>
-              <a:srgbClr val="2E6B46"/>
-            </a:solidFill>
-          </a:ln>
-          <a:effectLst/>
-        </p:spPr>
-        <p:style>
-          <a:lnRef idx="1">
-            <a:schemeClr val="accent1"/>
-          </a:lnRef>
-          <a:fillRef idx="3">
-            <a:schemeClr val="accent1"/>
-          </a:fillRef>
-          <a:effectRef idx="2">
-            <a:schemeClr val="accent1"/>
-          </a:effectRef>
-          <a:fontRef idx="minor">
-            <a:schemeClr val="lt1"/>
-          </a:fontRef>
-        </p:style>
-        <p:txBody>
-          <a:bodyPr rtlCol="0" anchor="ctr"/>
-          <a:lstStyle/>
-          <a:p>
-            <a:pPr algn="ctr"/>
-          </a:p>
-        </p:txBody>
-      </p:sp>
       <p:sp>
         <p:nvSpPr>
           <p:cNvPr id="5" name="Rectangle 4"/>
@@ -3718,8 +3608,8 @@
         </p:nvSpPr>
         <p:spPr>
           <a:xfrm>
-            <a:off x="502920" y="457200"/>
-            <a:ext cx="11183112" cy="640080"/>
+            <a:off x="731520" y="1261872"/>
+            <a:ext cx="2926080" cy="36576"/>
           </a:xfrm>
           <a:prstGeom prst="rect">
             <a:avLst/>
@@ -3754,182 +3644,6 @@
           </a:p>
         </p:txBody>
       </p:sp>
-      <p:sp>
-        <p:nvSpPr>
-          <p:cNvPr id="2" name="Title 1"/>
-          <p:cNvSpPr>
-            <a:spLocks noGrp="1"/>
-          </p:cNvSpPr>
-          <p:nvPr>
-            <p:ph type="title"/>
-          </p:nvPr>
-        </p:nvSpPr>
-        <p:spPr>
-          <a:xfrm>
-            <a:off x="822960" y="457200"/>
-            <a:ext cx="10515600" cy="640080"/>
-          </a:xfrm>
-        </p:spPr>
-        <p:txBody>
-          <a:bodyPr wrap="square" anchor="ctr"/>
-          <a:lstStyle/>
-          <a:p>
-            <a:pPr algn="l"/>
-            <a:r>
-              <a:rPr b="1" sz="2200">
-                <a:solidFill>
-                  <a:srgbClr val="FFFFFF"/>
-                </a:solidFill>
-                <a:latin typeface="Cambria"/>
-              </a:rPr>
-              <a:t>From the reserve to a live dashboard</a:t>
-            </a:r>
-          </a:p>
-        </p:txBody>
-      </p:sp>
-      <p:sp>
-        <p:nvSpPr>
-          <p:cNvPr id="3" name="Content Placeholder 2"/>
-          <p:cNvSpPr>
-            <a:spLocks noGrp="1"/>
-          </p:cNvSpPr>
-          <p:nvPr>
-            <p:ph idx="1"/>
-          </p:nvPr>
-        </p:nvSpPr>
-        <p:spPr>
-          <a:xfrm>
-            <a:off x="960120" y="1371600"/>
-            <a:ext cx="5394960" cy="4754880"/>
-          </a:xfrm>
-        </p:spPr>
-        <p:txBody>
-          <a:bodyPr wrap="square">
-            <a:normAutofit/>
-          </a:bodyPr>
-          <a:lstStyle/>
-          <a:p>
-            <a:pPr>
-              <a:spcAft>
-                <a:spcPts val="800"/>
-              </a:spcAft>
-            </a:pPr>
-            <a:r>
-              <a:rPr sz="1500" b="1">
-                <a:solidFill>
-                  <a:srgbClr val="2E6B46"/>
-                </a:solidFill>
-                <a:latin typeface="Georgia"/>
-              </a:rPr>
-              <a:t>Ingest, from the sensors into the store:</a:t>
-            </a:r>
-          </a:p>
-          <a:p>
-            <a:pPr lvl="1">
-              <a:spcAft>
-                <a:spcPts val="800"/>
-              </a:spcAft>
-            </a:pPr>
-            <a:r>
-              <a:rPr sz="1300" b="0">
-                <a:solidFill>
-                  <a:srgbClr val="232A26"/>
-                </a:solidFill>
-                <a:latin typeface="Georgia"/>
-              </a:rPr>
-              <a:t>Field sensors, 10 feeds across 2 reserves, reach the fog node, which windows, aggregates, and alerts, running at the reserve edge on EC2.</a:t>
-            </a:r>
-          </a:p>
-          <a:p>
-            <a:pPr lvl="1">
-              <a:spcAft>
-                <a:spcPts val="800"/>
-              </a:spcAft>
-            </a:pPr>
-            <a:r>
-              <a:rPr sz="1300" b="0">
-                <a:solidFill>
-                  <a:srgbClr val="232A26"/>
-                </a:solidFill>
-                <a:latin typeface="Georgia"/>
-              </a:rPr>
-              <a:t>The fog node feeds an Amazon SQS aggregate queue, an AWS Lambda serverless ingest, and an Amazon DynamoDB readings store, all managed AWS services with no server to run.</a:t>
-            </a:r>
-          </a:p>
-          <a:p>
-            <a:pPr>
-              <a:spcAft>
-                <a:spcPts val="800"/>
-              </a:spcAft>
-            </a:pPr>
-            <a:r>
-              <a:rPr sz="1500" b="1">
-                <a:solidFill>
-                  <a:srgbClr val="2E6B46"/>
-                </a:solidFill>
-                <a:latin typeface="Georgia"/>
-              </a:rPr>
-              <a:t>Serve, the dashboard reads back:</a:t>
-            </a:r>
-          </a:p>
-          <a:p>
-            <a:pPr lvl="1">
-              <a:spcAft>
-                <a:spcPts val="800"/>
-              </a:spcAft>
-            </a:pPr>
-            <a:r>
-              <a:rPr sz="1300" b="0">
-                <a:solidFill>
-                  <a:srgbClr val="232A26"/>
-                </a:solidFill>
-                <a:latin typeface="Georgia"/>
-              </a:rPr>
-              <a:t>An AWS Lambda dashboard API behind an Amazon API Gateway REST API reads the store.</a:t>
-            </a:r>
-          </a:p>
-          <a:p>
-            <a:pPr lvl="1">
-              <a:spcAft>
-                <a:spcPts val="800"/>
-              </a:spcAft>
-            </a:pPr>
-            <a:r>
-              <a:rPr sz="1300" b="0">
-                <a:solidFill>
-                  <a:srgbClr val="232A26"/>
-                </a:solidFill>
-                <a:latin typeface="Georgia"/>
-              </a:rPr>
-              <a:t>The live dashboard is served from Amazon S3: both reserves side by side, a field-station log, and live alert flags.</a:t>
-            </a:r>
-          </a:p>
-        </p:txBody>
-      </p:sp>
-      <p:pic>
-        <p:nvPicPr>
-          <p:cNvPr id="6" name="Picture 5" descr="topology.png"/>
-          <p:cNvPicPr>
-            <a:picLocks noChangeAspect="1"/>
-          </p:cNvPicPr>
-          <p:nvPr/>
-        </p:nvPicPr>
-        <p:blipFill>
-          <a:blip r:embed="rId2"/>
-          <a:stretch>
-            <a:fillRect/>
-          </a:stretch>
-        </p:blipFill>
-        <p:spPr>
-          <a:xfrm>
-            <a:off x="6400800" y="2484182"/>
-            <a:ext cx="4937760" cy="2438274"/>
-          </a:xfrm>
-          <a:prstGeom prst="rect">
-            <a:avLst/>
-          </a:prstGeom>
-        </p:spPr>
-      </p:pic>
     </p:spTree>
   </p:cSld>
   <p:clrMapOvr>
@@ -3938,7 +3652,7 @@
 </p:sld>
 </file>
 
-<file path=ppt/slides/slide4.xml><?xml version="1.0" encoding="utf-8"?>
+<file path=ppt/slides/slide3.xml><?xml version="1.0" encoding="utf-8"?>
 <p:sld xmlns:a="http://schemas.openxmlformats.org/drawingml/2006/main" xmlns:p="http://schemas.openxmlformats.org/presentationml/2006/main" xmlns:r="http://schemas.openxmlformats.org/officeDocument/2006/relationships">
   <p:cSld>
     <p:spTree>
@@ -3950,60 +3664,14 @@
       <p:grpSpPr/>
       <p:sp>
         <p:nvSpPr>
-          <p:cNvPr id="4" name="Rounded Rectangle 3"/>
+          <p:cNvPr id="4" name="Rectangle 3"/>
           <p:cNvSpPr/>
           <p:nvPr/>
         </p:nvSpPr>
         <p:spPr>
           <a:xfrm>
-            <a:off x="502920" y="457200"/>
-            <a:ext cx="11183112" cy="5943600"/>
-          </a:xfrm>
-          <a:prstGeom prst="roundRect">
-            <a:avLst/>
-          </a:prstGeom>
-          <a:solidFill>
-            <a:srgbClr val="E5EDE8"/>
-          </a:solidFill>
-          <a:ln w="15240">
-            <a:solidFill>
-              <a:srgbClr val="2E6B46"/>
-            </a:solidFill>
-          </a:ln>
-          <a:effectLst/>
-        </p:spPr>
-        <p:style>
-          <a:lnRef idx="1">
-            <a:schemeClr val="accent1"/>
-          </a:lnRef>
-          <a:fillRef idx="3">
-            <a:schemeClr val="accent1"/>
-          </a:fillRef>
-          <a:effectRef idx="2">
-            <a:schemeClr val="accent1"/>
-          </a:effectRef>
-          <a:fontRef idx="minor">
-            <a:schemeClr val="lt1"/>
-          </a:fontRef>
-        </p:style>
-        <p:txBody>
-          <a:bodyPr rtlCol="0" anchor="ctr"/>
-          <a:lstStyle/>
-          <a:p>
-            <a:pPr algn="ctr"/>
-          </a:p>
-        </p:txBody>
-      </p:sp>
-      <p:sp>
-        <p:nvSpPr>
-          <p:cNvPr id="5" name="Rectangle 4"/>
-          <p:cNvSpPr/>
-          <p:nvPr/>
-        </p:nvSpPr>
-        <p:spPr>
-          <a:xfrm>
-            <a:off x="502920" y="457200"/>
-            <a:ext cx="11183112" cy="640080"/>
+            <a:off x="0" y="0"/>
+            <a:ext cx="310896" cy="6858000"/>
           </a:xfrm>
           <a:prstGeom prst="rect">
             <a:avLst/>
@@ -4050,23 +3718,23 @@
         </p:nvSpPr>
         <p:spPr>
           <a:xfrm>
-            <a:off x="822960" y="457200"/>
-            <a:ext cx="10515600" cy="640080"/>
+            <a:off x="713232" y="384048"/>
+            <a:ext cx="10789920" cy="868680"/>
           </a:xfrm>
         </p:spPr>
         <p:txBody>
-          <a:bodyPr wrap="square" anchor="ctr"/>
+          <a:bodyPr wrap="square" anchor="t"/>
           <a:lstStyle/>
           <a:p>
             <a:pPr algn="l"/>
             <a:r>
-              <a:rPr b="1" sz="2200">
-                <a:solidFill>
-                  <a:srgbClr val="FFFFFF"/>
+              <a:rPr b="1" sz="2700">
+                <a:solidFill>
+                  <a:srgbClr val="2E6B46"/>
                 </a:solidFill>
                 <a:latin typeface="Cambria"/>
               </a:rPr>
-              <a:t>Demonstration: live on AWS</a:t>
+              <a:t>From the reserve to a live dashboard</a:t>
             </a:r>
           </a:p>
         </p:txBody>
@@ -4083,8 +3751,8 @@
         </p:nvSpPr>
         <p:spPr>
           <a:xfrm>
-            <a:off x="960120" y="1371600"/>
-            <a:ext cx="5394960" cy="4754880"/>
+            <a:off x="731520" y="1481328"/>
+            <a:ext cx="5669280" cy="4754880"/>
           </a:xfrm>
         </p:spPr>
         <p:txBody>
@@ -4099,13 +3767,45 @@
               </a:spcAft>
             </a:pPr>
             <a:r>
-              <a:rPr sz="1500" b="0">
-                <a:solidFill>
-                  <a:srgbClr val="232A26"/>
+              <a:rPr sz="1500" b="1">
+                <a:solidFill>
+                  <a:srgbClr val="2E6B46"/>
                 </a:solidFill>
                 <a:latin typeface="Georgia"/>
               </a:rPr>
-              <a:t>The deployed dashboard during the live browser check, served from the Amazon S3 frontend.</a:t>
+              <a:t>Ingest, from the sensors into the store:</a:t>
+            </a:r>
+          </a:p>
+          <a:p>
+            <a:pPr lvl="1">
+              <a:spcAft>
+                <a:spcPts val="800"/>
+              </a:spcAft>
+            </a:pPr>
+            <a:r>
+              <a:rPr sz="1300" b="0">
+                <a:solidFill>
+                  <a:srgbClr val="232A26"/>
+                </a:solidFill>
+                <a:latin typeface="Georgia"/>
+              </a:rPr>
+              <a:t>Field sensors, 10 feeds across 2 reserves, reach the fog node, which windows, aggregates, and alerts, running at the reserve edge on EC2.</a:t>
+            </a:r>
+          </a:p>
+          <a:p>
+            <a:pPr lvl="1">
+              <a:spcAft>
+                <a:spcPts val="800"/>
+              </a:spcAft>
+            </a:pPr>
+            <a:r>
+              <a:rPr sz="1300" b="0">
+                <a:solidFill>
+                  <a:srgbClr val="232A26"/>
+                </a:solidFill>
+                <a:latin typeface="Georgia"/>
+              </a:rPr>
+              <a:t>The fog node feeds an Amazon SQS aggregate queue, an AWS Lambda serverless ingest, and an Amazon DynamoDB readings store, all managed AWS services with no server to run.</a:t>
             </a:r>
           </a:p>
           <a:p>
@@ -4121,7 +3821,7 @@
                 </a:solidFill>
                 <a:latin typeface="Georgia"/>
               </a:rPr>
-              <a:t>Measured on the live deployment:</a:t>
+              <a:t>Serve, the dashboard reads back:</a:t>
             </a:r>
           </a:p>
           <a:p>
@@ -4137,7 +3837,7 @@
                 </a:solidFill>
                 <a:latin typeface="Georgia"/>
               </a:rPr>
-              <a:t>4 of 4 pipeline health checks true: gateway, queue, Lambda, pipeline, with the freshest reading under 6 seconds old.</a:t>
+              <a:t>An AWS Lambda dashboard API behind an Amazon API Gateway REST API reads the store.</a:t>
             </a:r>
           </a:p>
           <a:p>
@@ -4153,112 +3853,8 @@
                 </a:solidFill>
                 <a:latin typeface="Georgia"/>
               </a:rPr>
-              <a:t>82 tests pass across all four modules: sensors, fog, backend processor, and dashboard.</a:t>
-            </a:r>
-          </a:p>
-          <a:p>
-            <a:pPr lvl="1">
-              <a:spcAft>
-                <a:spcPts val="800"/>
-              </a:spcAft>
-            </a:pPr>
-            <a:r>
-              <a:rPr sz="1300" b="0">
-                <a:solidFill>
-                  <a:srgbClr val="232A26"/>
-                </a:solidFill>
-                <a:latin typeface="Georgia"/>
-              </a:rPr>
-              <a:t>Stored readings climbed from 362 to 378 in 15 seconds during live verification, with alert flags tripping on real thresholds.</a:t>
-            </a:r>
-          </a:p>
-        </p:txBody>
-      </p:sp>
-      <p:pic>
-        <p:nvPicPr>
-          <p:cNvPr id="6" name="Picture 5" descr="dashboard.png"/>
-          <p:cNvPicPr>
-            <a:picLocks noChangeAspect="1"/>
-          </p:cNvPicPr>
-          <p:nvPr/>
-        </p:nvPicPr>
-        <p:blipFill>
-          <a:blip r:embed="rId2"/>
-          <a:stretch>
-            <a:fillRect/>
-          </a:stretch>
-        </p:blipFill>
-        <p:spPr>
-          <a:xfrm>
-            <a:off x="6400800" y="1784151"/>
-            <a:ext cx="4937760" cy="3838336"/>
-          </a:xfrm>
-          <a:prstGeom prst="rect">
-            <a:avLst/>
-          </a:prstGeom>
-        </p:spPr>
-      </p:pic>
-    </p:spTree>
-  </p:cSld>
-  <p:clrMapOvr>
-    <a:masterClrMapping/>
-  </p:clrMapOvr>
-</p:sld>
-</file>
-
-<file path=ppt/slides/slide5.xml><?xml version="1.0" encoding="utf-8"?>
-<p:sld xmlns:a="http://schemas.openxmlformats.org/drawingml/2006/main" xmlns:p="http://schemas.openxmlformats.org/presentationml/2006/main" xmlns:r="http://schemas.openxmlformats.org/officeDocument/2006/relationships">
-  <p:cSld>
-    <p:spTree>
-      <p:nvGrpSpPr>
-        <p:cNvPr id="1" name=""/>
-        <p:cNvGrpSpPr/>
-        <p:nvPr/>
-      </p:nvGrpSpPr>
-      <p:grpSpPr/>
-      <p:sp>
-        <p:nvSpPr>
-          <p:cNvPr id="4" name="Rounded Rectangle 3"/>
-          <p:cNvSpPr/>
-          <p:nvPr/>
-        </p:nvSpPr>
-        <p:spPr>
-          <a:xfrm>
-            <a:off x="502920" y="457200"/>
-            <a:ext cx="11183112" cy="5943600"/>
-          </a:xfrm>
-          <a:prstGeom prst="roundRect">
-            <a:avLst/>
-          </a:prstGeom>
-          <a:solidFill>
-            <a:srgbClr val="E5EDE8"/>
-          </a:solidFill>
-          <a:ln w="15240">
-            <a:solidFill>
-              <a:srgbClr val="2E6B46"/>
-            </a:solidFill>
-          </a:ln>
-          <a:effectLst/>
-        </p:spPr>
-        <p:style>
-          <a:lnRef idx="1">
-            <a:schemeClr val="accent1"/>
-          </a:lnRef>
-          <a:fillRef idx="3">
-            <a:schemeClr val="accent1"/>
-          </a:fillRef>
-          <a:effectRef idx="2">
-            <a:schemeClr val="accent1"/>
-          </a:effectRef>
-          <a:fontRef idx="minor">
-            <a:schemeClr val="lt1"/>
-          </a:fontRef>
-        </p:style>
-        <p:txBody>
-          <a:bodyPr rtlCol="0" anchor="ctr"/>
-          <a:lstStyle/>
-          <a:p>
-            <a:pPr algn="ctr"/>
+              <a:t>The live dashboard is served from Amazon S3: both reserves side by side, a field-station log, and live alert flags.</a:t>
+            </a:r>
           </a:p>
         </p:txBody>
       </p:sp>
@@ -4270,8 +3866,8 @@
         </p:nvSpPr>
         <p:spPr>
           <a:xfrm>
-            <a:off x="502920" y="457200"/>
-            <a:ext cx="11183112" cy="640080"/>
+            <a:off x="731520" y="1261872"/>
+            <a:ext cx="2926080" cy="36576"/>
           </a:xfrm>
           <a:prstGeom prst="rect">
             <a:avLst/>
@@ -4306,222 +3902,30 @@
           </a:p>
         </p:txBody>
       </p:sp>
-      <p:sp>
-        <p:nvSpPr>
-          <p:cNvPr id="2" name="Title 1"/>
-          <p:cNvSpPr>
-            <a:spLocks noGrp="1"/>
-          </p:cNvSpPr>
-          <p:nvPr>
-            <p:ph type="title"/>
-          </p:nvPr>
-        </p:nvSpPr>
+      <p:pic>
+        <p:nvPicPr>
+          <p:cNvPr id="6" name="Picture 5" descr="topology.png"/>
+          <p:cNvPicPr>
+            <a:picLocks noChangeAspect="1"/>
+          </p:cNvPicPr>
+          <p:nvPr/>
+        </p:nvPicPr>
+        <p:blipFill>
+          <a:blip r:embed="rId2"/>
+          <a:stretch>
+            <a:fillRect/>
+          </a:stretch>
+        </p:blipFill>
         <p:spPr>
           <a:xfrm>
-            <a:off x="822960" y="457200"/>
-            <a:ext cx="10515600" cy="640080"/>
+            <a:off x="6675120" y="2562190"/>
+            <a:ext cx="5029200" cy="2483427"/>
           </a:xfrm>
+          <a:prstGeom prst="rect">
+            <a:avLst/>
+          </a:prstGeom>
         </p:spPr>
-        <p:txBody>
-          <a:bodyPr wrap="square" anchor="ctr"/>
-          <a:lstStyle/>
-          <a:p>
-            <a:pPr algn="l"/>
-            <a:r>
-              <a:rPr b="1" sz="2200">
-                <a:solidFill>
-                  <a:srgbClr val="FFFFFF"/>
-                </a:solidFill>
-                <a:latin typeface="Cambria"/>
-              </a:rPr>
-              <a:t>The hardest part</a:t>
-            </a:r>
-          </a:p>
-        </p:txBody>
-      </p:sp>
-      <p:sp>
-        <p:nvSpPr>
-          <p:cNvPr id="3" name="Content Placeholder 2"/>
-          <p:cNvSpPr>
-            <a:spLocks noGrp="1"/>
-          </p:cNvSpPr>
-          <p:nvPr>
-            <p:ph idx="1"/>
-          </p:nvPr>
-        </p:nvSpPr>
-        <p:spPr>
-          <a:xfrm>
-            <a:off x="960120" y="1371600"/>
-            <a:ext cx="10241280" cy="4754880"/>
-          </a:xfrm>
-        </p:spPr>
-        <p:txBody>
-          <a:bodyPr wrap="square">
-            <a:normAutofit/>
-          </a:bodyPr>
-          <a:lstStyle/>
-          <a:p>
-            <a:pPr>
-              <a:spcAft>
-                <a:spcPts val="600"/>
-              </a:spcAft>
-            </a:pPr>
-            <a:r>
-              <a:rPr sz="1500" b="1">
-                <a:solidFill>
-                  <a:srgbClr val="2E6B46"/>
-                </a:solidFill>
-                <a:latin typeface="Georgia"/>
-              </a:rPr>
-              <a:t>A silent DynamoDB undercount that passed every local test.</a:t>
-            </a:r>
-          </a:p>
-          <a:p>
-            <a:pPr>
-              <a:spcAft>
-                <a:spcPts val="600"/>
-              </a:spcAft>
-            </a:pPr>
-            <a:r>
-              <a:rPr sz="1500" b="1">
-                <a:solidFill>
-                  <a:srgbClr val="2E6B46"/>
-                </a:solidFill>
-                <a:latin typeface="Georgia"/>
-              </a:rPr>
-              <a:t>The problem:</a:t>
-            </a:r>
-          </a:p>
-          <a:p>
-            <a:pPr lvl="1">
-              <a:spcAft>
-                <a:spcPts val="600"/>
-              </a:spcAft>
-            </a:pPr>
-            <a:r>
-              <a:rPr sz="1300" b="0">
-                <a:solidFill>
-                  <a:srgbClr val="232A26"/>
-                </a:solidFill>
-                <a:latin typeface="Georgia"/>
-              </a:rPr>
-              <a:t>The dashboard's stored-readings count came from a single DynamoDB scan. One scan call returns only about 1 MB of data and hands back a cursor for the rest, so the count silently stops short, and no error is raised anywhere.</a:t>
-            </a:r>
-          </a:p>
-          <a:p>
-            <a:pPr>
-              <a:spcAft>
-                <a:spcPts val="600"/>
-              </a:spcAft>
-            </a:pPr>
-            <a:r>
-              <a:rPr sz="1500" b="1">
-                <a:solidFill>
-                  <a:srgbClr val="2E6B46"/>
-                </a:solidFill>
-                <a:latin typeface="Georgia"/>
-              </a:rPr>
-              <a:t>Why it was hard:</a:t>
-            </a:r>
-          </a:p>
-          <a:p>
-            <a:pPr lvl="1">
-              <a:spcAft>
-                <a:spcPts val="600"/>
-              </a:spcAft>
-            </a:pPr>
-            <a:r>
-              <a:rPr sz="1300" b="0">
-                <a:solidFill>
-                  <a:srgbClr val="232A26"/>
-                </a:solidFill>
-                <a:latin typeface="Georgia"/>
-              </a:rPr>
-              <a:t>All 82 local tests and a full LocalStack integration run stayed green: a small local table fits in one page, so nothing could expose the missing pages. Only a real AWS table growing past that boundary makes the number wrong.</a:t>
-            </a:r>
-          </a:p>
-          <a:p>
-            <a:pPr>
-              <a:spcAft>
-                <a:spcPts val="600"/>
-              </a:spcAft>
-            </a:pPr>
-            <a:r>
-              <a:rPr sz="1500" b="1">
-                <a:solidFill>
-                  <a:srgbClr val="2E6B46"/>
-                </a:solidFill>
-                <a:latin typeface="Georgia"/>
-              </a:rPr>
-              <a:t>How it was solved:</a:t>
-            </a:r>
-          </a:p>
-          <a:p>
-            <a:pPr lvl="1">
-              <a:spcAft>
-                <a:spcPts val="600"/>
-              </a:spcAft>
-            </a:pPr>
-            <a:r>
-              <a:rPr sz="1300" b="0">
-                <a:solidFill>
-                  <a:srgbClr val="232A26"/>
-                </a:solidFill>
-                <a:latin typeface="Georgia"/>
-              </a:rPr>
-              <a:t>The count now follows the cursor page by page with the SDK's own paginator, locked in by a four-page regression test and re-verified against the live account. The same audit also caught unbatched SQS sends, now grouped ten per call.</a:t>
-            </a:r>
-          </a:p>
-          <a:p>
-            <a:pPr>
-              <a:spcAft>
-                <a:spcPts val="600"/>
-              </a:spcAft>
-            </a:pPr>
-            <a:r>
-              <a:rPr sz="1500" b="1">
-                <a:solidFill>
-                  <a:srgbClr val="2E6B46"/>
-                </a:solidFill>
-                <a:latin typeface="Georgia"/>
-              </a:rPr>
-              <a:t>Why local green lied: 82 of 82 local tests green, and the defect still shipped.</a:t>
-            </a:r>
-          </a:p>
-          <a:p>
-            <a:pPr lvl="1">
-              <a:spcAft>
-                <a:spcPts val="600"/>
-              </a:spcAft>
-            </a:pPr>
-            <a:r>
-              <a:rPr sz="1300" b="0">
-                <a:solidFill>
-                  <a:srgbClr val="232A26"/>
-                </a:solidFill>
-                <a:latin typeface="Georgia"/>
-              </a:rPr>
-              <a:t>About 1 MB is all one scan call returns; the rest hides behind a pagination cursor.</a:t>
-            </a:r>
-          </a:p>
-          <a:p>
-            <a:pPr lvl="1">
-              <a:spcAft>
-                <a:spcPts val="600"/>
-              </a:spcAft>
-            </a:pPr>
-            <a:r>
-              <a:rPr sz="1300" b="0">
-                <a:solidFill>
-                  <a:srgbClr val="232A26"/>
-                </a:solidFill>
-                <a:latin typeface="Georgia"/>
-              </a:rPr>
-              <a:t>1,287 items summed across four pages (400 plus 400 plus 400 plus 87) by the regression test that locks the fix in.</a:t>
-            </a:r>
-          </a:p>
-        </p:txBody>
-      </p:sp>
+      </p:pic>
     </p:spTree>
   </p:cSld>
   <p:clrMapOvr>
@@ -4530,7 +3934,7 @@
 </p:sld>
 </file>
 
-<file path=ppt/slides/slide6.xml><?xml version="1.0" encoding="utf-8"?>
+<file path=ppt/slides/slide4.xml><?xml version="1.0" encoding="utf-8"?>
 <p:sld xmlns:a="http://schemas.openxmlformats.org/drawingml/2006/main" xmlns:p="http://schemas.openxmlformats.org/presentationml/2006/main" xmlns:r="http://schemas.openxmlformats.org/officeDocument/2006/relationships">
   <p:cSld>
     <p:spTree>
@@ -4542,60 +3946,14 @@
       <p:grpSpPr/>
       <p:sp>
         <p:nvSpPr>
-          <p:cNvPr id="4" name="Rounded Rectangle 3"/>
+          <p:cNvPr id="4" name="Rectangle 3"/>
           <p:cNvSpPr/>
           <p:nvPr/>
         </p:nvSpPr>
         <p:spPr>
           <a:xfrm>
-            <a:off x="502920" y="457200"/>
-            <a:ext cx="11183112" cy="5943600"/>
-          </a:xfrm>
-          <a:prstGeom prst="roundRect">
-            <a:avLst/>
-          </a:prstGeom>
-          <a:solidFill>
-            <a:srgbClr val="E5EDE8"/>
-          </a:solidFill>
-          <a:ln w="15240">
-            <a:solidFill>
-              <a:srgbClr val="2E6B46"/>
-            </a:solidFill>
-          </a:ln>
-          <a:effectLst/>
-        </p:spPr>
-        <p:style>
-          <a:lnRef idx="1">
-            <a:schemeClr val="accent1"/>
-          </a:lnRef>
-          <a:fillRef idx="3">
-            <a:schemeClr val="accent1"/>
-          </a:fillRef>
-          <a:effectRef idx="2">
-            <a:schemeClr val="accent1"/>
-          </a:effectRef>
-          <a:fontRef idx="minor">
-            <a:schemeClr val="lt1"/>
-          </a:fontRef>
-        </p:style>
-        <p:txBody>
-          <a:bodyPr rtlCol="0" anchor="ctr"/>
-          <a:lstStyle/>
-          <a:p>
-            <a:pPr algn="ctr"/>
-          </a:p>
-        </p:txBody>
-      </p:sp>
-      <p:sp>
-        <p:nvSpPr>
-          <p:cNvPr id="5" name="Rectangle 4"/>
-          <p:cNvSpPr/>
-          <p:nvPr/>
-        </p:nvSpPr>
-        <p:spPr>
-          <a:xfrm>
-            <a:off x="502920" y="457200"/>
-            <a:ext cx="11183112" cy="640080"/>
+            <a:off x="0" y="0"/>
+            <a:ext cx="310896" cy="6858000"/>
           </a:xfrm>
           <a:prstGeom prst="rect">
             <a:avLst/>
@@ -4642,19 +4000,607 @@
         </p:nvSpPr>
         <p:spPr>
           <a:xfrm>
-            <a:off x="822960" y="457200"/>
-            <a:ext cx="10515600" cy="640080"/>
+            <a:off x="713232" y="384048"/>
+            <a:ext cx="10789920" cy="868680"/>
           </a:xfrm>
         </p:spPr>
         <p:txBody>
-          <a:bodyPr wrap="square" anchor="ctr"/>
+          <a:bodyPr wrap="square" anchor="t"/>
           <a:lstStyle/>
           <a:p>
             <a:pPr algn="l"/>
             <a:r>
-              <a:rPr b="1" sz="2200">
-                <a:solidFill>
-                  <a:srgbClr val="FFFFFF"/>
+              <a:rPr b="1" sz="2700">
+                <a:solidFill>
+                  <a:srgbClr val="2E6B46"/>
+                </a:solidFill>
+                <a:latin typeface="Cambria"/>
+              </a:rPr>
+              <a:t>Demonstration: live on AWS</a:t>
+            </a:r>
+          </a:p>
+        </p:txBody>
+      </p:sp>
+      <p:sp>
+        <p:nvSpPr>
+          <p:cNvPr id="3" name="Content Placeholder 2"/>
+          <p:cNvSpPr>
+            <a:spLocks noGrp="1"/>
+          </p:cNvSpPr>
+          <p:nvPr>
+            <p:ph idx="1"/>
+          </p:nvPr>
+        </p:nvSpPr>
+        <p:spPr>
+          <a:xfrm>
+            <a:off x="731520" y="1481328"/>
+            <a:ext cx="5669280" cy="4754880"/>
+          </a:xfrm>
+        </p:spPr>
+        <p:txBody>
+          <a:bodyPr wrap="square">
+            <a:normAutofit/>
+          </a:bodyPr>
+          <a:lstStyle/>
+          <a:p>
+            <a:pPr>
+              <a:spcAft>
+                <a:spcPts val="800"/>
+              </a:spcAft>
+            </a:pPr>
+            <a:r>
+              <a:rPr sz="1500" b="0">
+                <a:solidFill>
+                  <a:srgbClr val="232A26"/>
+                </a:solidFill>
+                <a:latin typeface="Georgia"/>
+              </a:rPr>
+              <a:t>The deployed dashboard during the live browser check, served from the Amazon S3 frontend.</a:t>
+            </a:r>
+          </a:p>
+          <a:p>
+            <a:pPr>
+              <a:spcAft>
+                <a:spcPts val="800"/>
+              </a:spcAft>
+            </a:pPr>
+            <a:r>
+              <a:rPr sz="1500" b="1">
+                <a:solidFill>
+                  <a:srgbClr val="2E6B46"/>
+                </a:solidFill>
+                <a:latin typeface="Georgia"/>
+              </a:rPr>
+              <a:t>Measured on the live deployment:</a:t>
+            </a:r>
+          </a:p>
+          <a:p>
+            <a:pPr lvl="1">
+              <a:spcAft>
+                <a:spcPts val="800"/>
+              </a:spcAft>
+            </a:pPr>
+            <a:r>
+              <a:rPr sz="1300" b="0">
+                <a:solidFill>
+                  <a:srgbClr val="232A26"/>
+                </a:solidFill>
+                <a:latin typeface="Georgia"/>
+              </a:rPr>
+              <a:t>4 of 4 pipeline health checks true: gateway, queue, Lambda, pipeline, with the freshest reading under 6 seconds old.</a:t>
+            </a:r>
+          </a:p>
+          <a:p>
+            <a:pPr lvl="1">
+              <a:spcAft>
+                <a:spcPts val="800"/>
+              </a:spcAft>
+            </a:pPr>
+            <a:r>
+              <a:rPr sz="1300" b="0">
+                <a:solidFill>
+                  <a:srgbClr val="232A26"/>
+                </a:solidFill>
+                <a:latin typeface="Georgia"/>
+              </a:rPr>
+              <a:t>82 tests pass across all four modules: sensors, fog, backend processor, and dashboard.</a:t>
+            </a:r>
+          </a:p>
+          <a:p>
+            <a:pPr lvl="1">
+              <a:spcAft>
+                <a:spcPts val="800"/>
+              </a:spcAft>
+            </a:pPr>
+            <a:r>
+              <a:rPr sz="1300" b="0">
+                <a:solidFill>
+                  <a:srgbClr val="232A26"/>
+                </a:solidFill>
+                <a:latin typeface="Georgia"/>
+              </a:rPr>
+              <a:t>Stored readings climbed from 362 to 378 in 15 seconds during live verification, with alert flags tripping on real thresholds.</a:t>
+            </a:r>
+          </a:p>
+        </p:txBody>
+      </p:sp>
+      <p:sp>
+        <p:nvSpPr>
+          <p:cNvPr id="5" name="Rectangle 4"/>
+          <p:cNvSpPr/>
+          <p:nvPr/>
+        </p:nvSpPr>
+        <p:spPr>
+          <a:xfrm>
+            <a:off x="731520" y="1261872"/>
+            <a:ext cx="2926080" cy="36576"/>
+          </a:xfrm>
+          <a:prstGeom prst="rect">
+            <a:avLst/>
+          </a:prstGeom>
+          <a:solidFill>
+            <a:srgbClr val="2E6B46"/>
+          </a:solidFill>
+          <a:ln>
+            <a:noFill/>
+          </a:ln>
+          <a:effectLst/>
+        </p:spPr>
+        <p:style>
+          <a:lnRef idx="1">
+            <a:schemeClr val="accent1"/>
+          </a:lnRef>
+          <a:fillRef idx="3">
+            <a:schemeClr val="accent1"/>
+          </a:fillRef>
+          <a:effectRef idx="2">
+            <a:schemeClr val="accent1"/>
+          </a:effectRef>
+          <a:fontRef idx="minor">
+            <a:schemeClr val="lt1"/>
+          </a:fontRef>
+        </p:style>
+        <p:txBody>
+          <a:bodyPr rtlCol="0" anchor="ctr"/>
+          <a:lstStyle/>
+          <a:p>
+            <a:pPr algn="ctr"/>
+          </a:p>
+        </p:txBody>
+      </p:sp>
+      <p:pic>
+        <p:nvPicPr>
+          <p:cNvPr id="6" name="Picture 5" descr="dashboard.png"/>
+          <p:cNvPicPr>
+            <a:picLocks noChangeAspect="1"/>
+          </p:cNvPicPr>
+          <p:nvPr/>
+        </p:nvPicPr>
+        <p:blipFill>
+          <a:blip r:embed="rId2"/>
+          <a:stretch>
+            <a:fillRect/>
+          </a:stretch>
+        </p:blipFill>
+        <p:spPr>
+          <a:xfrm>
+            <a:off x="6675120" y="1849195"/>
+            <a:ext cx="5029200" cy="3909417"/>
+          </a:xfrm>
+          <a:prstGeom prst="rect">
+            <a:avLst/>
+          </a:prstGeom>
+        </p:spPr>
+      </p:pic>
+    </p:spTree>
+  </p:cSld>
+  <p:clrMapOvr>
+    <a:masterClrMapping/>
+  </p:clrMapOvr>
+</p:sld>
+</file>
+
+<file path=ppt/slides/slide5.xml><?xml version="1.0" encoding="utf-8"?>
+<p:sld xmlns:a="http://schemas.openxmlformats.org/drawingml/2006/main" xmlns:p="http://schemas.openxmlformats.org/presentationml/2006/main" xmlns:r="http://schemas.openxmlformats.org/officeDocument/2006/relationships">
+  <p:cSld>
+    <p:spTree>
+      <p:nvGrpSpPr>
+        <p:cNvPr id="1" name=""/>
+        <p:cNvGrpSpPr/>
+        <p:nvPr/>
+      </p:nvGrpSpPr>
+      <p:grpSpPr/>
+      <p:sp>
+        <p:nvSpPr>
+          <p:cNvPr id="4" name="Rectangle 3"/>
+          <p:cNvSpPr/>
+          <p:nvPr/>
+        </p:nvSpPr>
+        <p:spPr>
+          <a:xfrm>
+            <a:off x="0" y="0"/>
+            <a:ext cx="310896" cy="6858000"/>
+          </a:xfrm>
+          <a:prstGeom prst="rect">
+            <a:avLst/>
+          </a:prstGeom>
+          <a:solidFill>
+            <a:srgbClr val="2E6B46"/>
+          </a:solidFill>
+          <a:ln>
+            <a:noFill/>
+          </a:ln>
+          <a:effectLst/>
+        </p:spPr>
+        <p:style>
+          <a:lnRef idx="1">
+            <a:schemeClr val="accent1"/>
+          </a:lnRef>
+          <a:fillRef idx="3">
+            <a:schemeClr val="accent1"/>
+          </a:fillRef>
+          <a:effectRef idx="2">
+            <a:schemeClr val="accent1"/>
+          </a:effectRef>
+          <a:fontRef idx="minor">
+            <a:schemeClr val="lt1"/>
+          </a:fontRef>
+        </p:style>
+        <p:txBody>
+          <a:bodyPr rtlCol="0" anchor="ctr"/>
+          <a:lstStyle/>
+          <a:p>
+            <a:pPr algn="ctr"/>
+          </a:p>
+        </p:txBody>
+      </p:sp>
+      <p:sp>
+        <p:nvSpPr>
+          <p:cNvPr id="2" name="Title 1"/>
+          <p:cNvSpPr>
+            <a:spLocks noGrp="1"/>
+          </p:cNvSpPr>
+          <p:nvPr>
+            <p:ph type="title"/>
+          </p:nvPr>
+        </p:nvSpPr>
+        <p:spPr>
+          <a:xfrm>
+            <a:off x="713232" y="384048"/>
+            <a:ext cx="10789920" cy="868680"/>
+          </a:xfrm>
+        </p:spPr>
+        <p:txBody>
+          <a:bodyPr wrap="square" anchor="t"/>
+          <a:lstStyle/>
+          <a:p>
+            <a:pPr algn="l"/>
+            <a:r>
+              <a:rPr b="1" sz="2700">
+                <a:solidFill>
+                  <a:srgbClr val="2E6B46"/>
+                </a:solidFill>
+                <a:latin typeface="Cambria"/>
+              </a:rPr>
+              <a:t>The hardest part</a:t>
+            </a:r>
+          </a:p>
+        </p:txBody>
+      </p:sp>
+      <p:sp>
+        <p:nvSpPr>
+          <p:cNvPr id="3" name="Content Placeholder 2"/>
+          <p:cNvSpPr>
+            <a:spLocks noGrp="1"/>
+          </p:cNvSpPr>
+          <p:nvPr>
+            <p:ph idx="1"/>
+          </p:nvPr>
+        </p:nvSpPr>
+        <p:spPr>
+          <a:xfrm>
+            <a:off x="731520" y="1481328"/>
+            <a:ext cx="10835640" cy="4846320"/>
+          </a:xfrm>
+        </p:spPr>
+        <p:txBody>
+          <a:bodyPr wrap="square">
+            <a:normAutofit/>
+          </a:bodyPr>
+          <a:lstStyle/>
+          <a:p>
+            <a:pPr>
+              <a:spcAft>
+                <a:spcPts val="600"/>
+              </a:spcAft>
+            </a:pPr>
+            <a:r>
+              <a:rPr sz="1500" b="1">
+                <a:solidFill>
+                  <a:srgbClr val="2E6B46"/>
+                </a:solidFill>
+                <a:latin typeface="Georgia"/>
+              </a:rPr>
+              <a:t>A silent DynamoDB undercount that passed every local test.</a:t>
+            </a:r>
+          </a:p>
+          <a:p>
+            <a:pPr>
+              <a:spcAft>
+                <a:spcPts val="600"/>
+              </a:spcAft>
+            </a:pPr>
+            <a:r>
+              <a:rPr sz="1500" b="1">
+                <a:solidFill>
+                  <a:srgbClr val="2E6B46"/>
+                </a:solidFill>
+                <a:latin typeface="Georgia"/>
+              </a:rPr>
+              <a:t>The problem:</a:t>
+            </a:r>
+          </a:p>
+          <a:p>
+            <a:pPr lvl="1">
+              <a:spcAft>
+                <a:spcPts val="600"/>
+              </a:spcAft>
+            </a:pPr>
+            <a:r>
+              <a:rPr sz="1300" b="0">
+                <a:solidFill>
+                  <a:srgbClr val="232A26"/>
+                </a:solidFill>
+                <a:latin typeface="Georgia"/>
+              </a:rPr>
+              <a:t>The dashboard's stored-readings count came from a single DynamoDB scan. One scan call returns only about 1 MB of data and hands back a cursor for the rest, so the count silently stops short, and no error is raised anywhere.</a:t>
+            </a:r>
+          </a:p>
+          <a:p>
+            <a:pPr>
+              <a:spcAft>
+                <a:spcPts val="600"/>
+              </a:spcAft>
+            </a:pPr>
+            <a:r>
+              <a:rPr sz="1500" b="1">
+                <a:solidFill>
+                  <a:srgbClr val="2E6B46"/>
+                </a:solidFill>
+                <a:latin typeface="Georgia"/>
+              </a:rPr>
+              <a:t>Why it was hard:</a:t>
+            </a:r>
+          </a:p>
+          <a:p>
+            <a:pPr lvl="1">
+              <a:spcAft>
+                <a:spcPts val="600"/>
+              </a:spcAft>
+            </a:pPr>
+            <a:r>
+              <a:rPr sz="1300" b="0">
+                <a:solidFill>
+                  <a:srgbClr val="232A26"/>
+                </a:solidFill>
+                <a:latin typeface="Georgia"/>
+              </a:rPr>
+              <a:t>All 82 local tests and a full LocalStack integration run stayed green: a small local table fits in one page, so nothing could expose the missing pages. Only a real AWS table growing past that boundary makes the number wrong.</a:t>
+            </a:r>
+          </a:p>
+          <a:p>
+            <a:pPr>
+              <a:spcAft>
+                <a:spcPts val="600"/>
+              </a:spcAft>
+            </a:pPr>
+            <a:r>
+              <a:rPr sz="1500" b="1">
+                <a:solidFill>
+                  <a:srgbClr val="2E6B46"/>
+                </a:solidFill>
+                <a:latin typeface="Georgia"/>
+              </a:rPr>
+              <a:t>How it was solved:</a:t>
+            </a:r>
+          </a:p>
+          <a:p>
+            <a:pPr lvl="1">
+              <a:spcAft>
+                <a:spcPts val="600"/>
+              </a:spcAft>
+            </a:pPr>
+            <a:r>
+              <a:rPr sz="1300" b="0">
+                <a:solidFill>
+                  <a:srgbClr val="232A26"/>
+                </a:solidFill>
+                <a:latin typeface="Georgia"/>
+              </a:rPr>
+              <a:t>The count now follows the cursor page by page with the SDK's own paginator, locked in by a four-page regression test and re-verified against the live account. The same audit also caught unbatched SQS sends, now grouped ten per call.</a:t>
+            </a:r>
+          </a:p>
+          <a:p>
+            <a:pPr>
+              <a:spcAft>
+                <a:spcPts val="600"/>
+              </a:spcAft>
+            </a:pPr>
+            <a:r>
+              <a:rPr sz="1500" b="1">
+                <a:solidFill>
+                  <a:srgbClr val="2E6B46"/>
+                </a:solidFill>
+                <a:latin typeface="Georgia"/>
+              </a:rPr>
+              <a:t>Why local green lied: 82 of 82 local tests green, and the defect still shipped.</a:t>
+            </a:r>
+          </a:p>
+          <a:p>
+            <a:pPr lvl="1">
+              <a:spcAft>
+                <a:spcPts val="600"/>
+              </a:spcAft>
+            </a:pPr>
+            <a:r>
+              <a:rPr sz="1300" b="0">
+                <a:solidFill>
+                  <a:srgbClr val="232A26"/>
+                </a:solidFill>
+                <a:latin typeface="Georgia"/>
+              </a:rPr>
+              <a:t>About 1 MB is all one scan call returns; the rest hides behind a pagination cursor.</a:t>
+            </a:r>
+          </a:p>
+          <a:p>
+            <a:pPr lvl="1">
+              <a:spcAft>
+                <a:spcPts val="600"/>
+              </a:spcAft>
+            </a:pPr>
+            <a:r>
+              <a:rPr sz="1300" b="0">
+                <a:solidFill>
+                  <a:srgbClr val="232A26"/>
+                </a:solidFill>
+                <a:latin typeface="Georgia"/>
+              </a:rPr>
+              <a:t>1,287 items summed across four pages (400 plus 400 plus 400 plus 87) by the regression test that locks the fix in.</a:t>
+            </a:r>
+          </a:p>
+        </p:txBody>
+      </p:sp>
+      <p:sp>
+        <p:nvSpPr>
+          <p:cNvPr id="5" name="Rectangle 4"/>
+          <p:cNvSpPr/>
+          <p:nvPr/>
+        </p:nvSpPr>
+        <p:spPr>
+          <a:xfrm>
+            <a:off x="731520" y="1261872"/>
+            <a:ext cx="2926080" cy="36576"/>
+          </a:xfrm>
+          <a:prstGeom prst="rect">
+            <a:avLst/>
+          </a:prstGeom>
+          <a:solidFill>
+            <a:srgbClr val="2E6B46"/>
+          </a:solidFill>
+          <a:ln>
+            <a:noFill/>
+          </a:ln>
+          <a:effectLst/>
+        </p:spPr>
+        <p:style>
+          <a:lnRef idx="1">
+            <a:schemeClr val="accent1"/>
+          </a:lnRef>
+          <a:fillRef idx="3">
+            <a:schemeClr val="accent1"/>
+          </a:fillRef>
+          <a:effectRef idx="2">
+            <a:schemeClr val="accent1"/>
+          </a:effectRef>
+          <a:fontRef idx="minor">
+            <a:schemeClr val="lt1"/>
+          </a:fontRef>
+        </p:style>
+        <p:txBody>
+          <a:bodyPr rtlCol="0" anchor="ctr"/>
+          <a:lstStyle/>
+          <a:p>
+            <a:pPr algn="ctr"/>
+          </a:p>
+        </p:txBody>
+      </p:sp>
+    </p:spTree>
+  </p:cSld>
+  <p:clrMapOvr>
+    <a:masterClrMapping/>
+  </p:clrMapOvr>
+</p:sld>
+</file>
+
+<file path=ppt/slides/slide6.xml><?xml version="1.0" encoding="utf-8"?>
+<p:sld xmlns:a="http://schemas.openxmlformats.org/drawingml/2006/main" xmlns:p="http://schemas.openxmlformats.org/presentationml/2006/main" xmlns:r="http://schemas.openxmlformats.org/officeDocument/2006/relationships">
+  <p:cSld>
+    <p:spTree>
+      <p:nvGrpSpPr>
+        <p:cNvPr id="1" name=""/>
+        <p:cNvGrpSpPr/>
+        <p:nvPr/>
+      </p:nvGrpSpPr>
+      <p:grpSpPr/>
+      <p:sp>
+        <p:nvSpPr>
+          <p:cNvPr id="4" name="Rectangle 3"/>
+          <p:cNvSpPr/>
+          <p:nvPr/>
+        </p:nvSpPr>
+        <p:spPr>
+          <a:xfrm>
+            <a:off x="0" y="0"/>
+            <a:ext cx="310896" cy="6858000"/>
+          </a:xfrm>
+          <a:prstGeom prst="rect">
+            <a:avLst/>
+          </a:prstGeom>
+          <a:solidFill>
+            <a:srgbClr val="2E6B46"/>
+          </a:solidFill>
+          <a:ln>
+            <a:noFill/>
+          </a:ln>
+          <a:effectLst/>
+        </p:spPr>
+        <p:style>
+          <a:lnRef idx="1">
+            <a:schemeClr val="accent1"/>
+          </a:lnRef>
+          <a:fillRef idx="3">
+            <a:schemeClr val="accent1"/>
+          </a:fillRef>
+          <a:effectRef idx="2">
+            <a:schemeClr val="accent1"/>
+          </a:effectRef>
+          <a:fontRef idx="minor">
+            <a:schemeClr val="lt1"/>
+          </a:fontRef>
+        </p:style>
+        <p:txBody>
+          <a:bodyPr rtlCol="0" anchor="ctr"/>
+          <a:lstStyle/>
+          <a:p>
+            <a:pPr algn="ctr"/>
+          </a:p>
+        </p:txBody>
+      </p:sp>
+      <p:sp>
+        <p:nvSpPr>
+          <p:cNvPr id="2" name="Title 1"/>
+          <p:cNvSpPr>
+            <a:spLocks noGrp="1"/>
+          </p:cNvSpPr>
+          <p:nvPr>
+            <p:ph type="title"/>
+          </p:nvPr>
+        </p:nvSpPr>
+        <p:spPr>
+          <a:xfrm>
+            <a:off x="713232" y="384048"/>
+            <a:ext cx="10789920" cy="868680"/>
+          </a:xfrm>
+        </p:spPr>
+        <p:txBody>
+          <a:bodyPr wrap="square" anchor="t"/>
+          <a:lstStyle/>
+          <a:p>
+            <a:pPr algn="l"/>
+            <a:r>
+              <a:rPr b="1" sz="2700">
+                <a:solidFill>
+                  <a:srgbClr val="2E6B46"/>
                 </a:solidFill>
                 <a:latin typeface="Cambria"/>
               </a:rPr>
@@ -4675,8 +4621,8 @@
         </p:nvSpPr>
         <p:spPr>
           <a:xfrm>
-            <a:off x="960120" y="1371600"/>
-            <a:ext cx="10241280" cy="4754880"/>
+            <a:off x="731520" y="1481328"/>
+            <a:ext cx="10835640" cy="4846320"/>
           </a:xfrm>
         </p:spPr>
         <p:txBody>
@@ -4795,6 +4741,50 @@
               </a:rPr>
               <a:t>Thank you. Questions?</a:t>
             </a:r>
+          </a:p>
+        </p:txBody>
+      </p:sp>
+      <p:sp>
+        <p:nvSpPr>
+          <p:cNvPr id="5" name="Rectangle 4"/>
+          <p:cNvSpPr/>
+          <p:nvPr/>
+        </p:nvSpPr>
+        <p:spPr>
+          <a:xfrm>
+            <a:off x="731520" y="1261872"/>
+            <a:ext cx="2926080" cy="36576"/>
+          </a:xfrm>
+          <a:prstGeom prst="rect">
+            <a:avLst/>
+          </a:prstGeom>
+          <a:solidFill>
+            <a:srgbClr val="2E6B46"/>
+          </a:solidFill>
+          <a:ln>
+            <a:noFill/>
+          </a:ln>
+          <a:effectLst/>
+        </p:spPr>
+        <p:style>
+          <a:lnRef idx="1">
+            <a:schemeClr val="accent1"/>
+          </a:lnRef>
+          <a:fillRef idx="3">
+            <a:schemeClr val="accent1"/>
+          </a:fillRef>
+          <a:effectRef idx="2">
+            <a:schemeClr val="accent1"/>
+          </a:effectRef>
+          <a:fontRef idx="minor">
+            <a:schemeClr val="lt1"/>
+          </a:fontRef>
+        </p:style>
+        <p:txBody>
+          <a:bodyPr rtlCol="0" anchor="ctr"/>
+          <a:lstStyle/>
+          <a:p>
+            <a:pPr algn="ctr"/>
           </a:p>
         </p:txBody>
       </p:sp>
